--- a/data/CISCLD-Ascend-client-briefing.pptx
+++ b/data/CISCLD-Ascend-client-briefing.pptx
@@ -17,6 +17,8 @@
     <p:sldId id="265" r:id="rId16"/>
     <p:sldId id="266" r:id="rId17"/>
     <p:sldId id="267" r:id="rId18"/>
+    <p:sldId id="268" r:id="rId19"/>
+    <p:sldId id="269" r:id="rId20"/>
   </p:sldIdLst>
   <p:sldSz cx="12191695" cy="6858000" type="screen4x3"/>
   <p:notesSz cx="6858000" cy="9144000"/>
@@ -4090,7 +4092,7 @@
                 </a:solidFill>
                 <a:latin typeface="Segoe UI"/>
               </a:rPr>
-              <a:t>ACCESS AND DATA HANDLING</a:t>
+              <a:t>LEAVING VMWARE</a:t>
             </a:r>
           </a:p>
         </p:txBody>
@@ -4129,21 +4131,104 @@
                 </a:solidFill>
                 <a:latin typeface="Segoe UI"/>
               </a:rPr>
-              <a:t>Signed in, and nothing kept</a:t>
-            </a:r>
-          </a:p>
-        </p:txBody>
-      </p:sp>
-      <p:sp>
-        <p:nvSpPr>
-          <p:cNvPr id="4" name="Rectangle 3"/>
+              <a:t>Fourteen destinations, six kinds of answer</a:t>
+            </a:r>
+          </a:p>
+        </p:txBody>
+      </p:sp>
+      <p:sp>
+        <p:nvSpPr>
+          <p:cNvPr id="4" name="TextBox 3"/>
+          <p:cNvSpPr txBox="1"/>
+          <p:nvPr/>
+        </p:nvSpPr>
+        <p:spPr>
+          <a:xfrm>
+            <a:off x="777240" y="1700784"/>
+            <a:ext cx="8778240" cy="640080"/>
+          </a:xfrm>
+          <a:prstGeom prst="rect">
+            <a:avLst/>
+          </a:prstGeom>
+          <a:noFill/>
+        </p:spPr>
+        <p:txBody>
+          <a:bodyPr wrap="square" anchor="t" lIns="0" rIns="0" tIns="0" bIns="0">
+            <a:spAutoFit/>
+          </a:bodyPr>
+          <a:lstStyle/>
+          <a:p>
+            <a:pPr algn="l">
+              <a:lnSpc>
+                <a:spcPct val="125000"/>
+              </a:lnSpc>
+            </a:pPr>
+            <a:r>
+              <a:rPr sz="1400" b="0">
+                <a:solidFill>
+                  <a:srgbClr val="5A6372"/>
+                </a:solidFill>
+                <a:latin typeface="Segoe UI"/>
+              </a:rPr>
+              <a:t>Ascend scores all fourteen, including the on-premises ones and doing nothing. The choice is not Azure or VMware; it is which of these six you are actually choosing between.</a:t>
+            </a:r>
+          </a:p>
+        </p:txBody>
+      </p:sp>
+      <p:sp>
+        <p:nvSpPr>
+          <p:cNvPr id="5" name="Rounded Rectangle 4"/>
           <p:cNvSpPr/>
           <p:nvPr/>
         </p:nvSpPr>
         <p:spPr>
           <a:xfrm>
-            <a:off x="777240" y="2368296"/>
-            <a:ext cx="45720" cy="201168"/>
+            <a:off x="777240" y="2606040"/>
+            <a:ext cx="3240938" cy="1783080"/>
+          </a:xfrm>
+          <a:prstGeom prst="roundRect">
+            <a:avLst/>
+          </a:prstGeom>
+          <a:solidFill>
+            <a:srgbClr val="F5F7FB"/>
+          </a:solidFill>
+          <a:ln>
+            <a:noFill/>
+          </a:ln>
+          <a:effectLst/>
+        </p:spPr>
+        <p:style>
+          <a:lnRef idx="1">
+            <a:schemeClr val="accent1"/>
+          </a:lnRef>
+          <a:fillRef idx="3">
+            <a:schemeClr val="accent1"/>
+          </a:fillRef>
+          <a:effectRef idx="2">
+            <a:schemeClr val="accent1"/>
+          </a:effectRef>
+          <a:fontRef idx="minor">
+            <a:schemeClr val="lt1"/>
+          </a:fontRef>
+        </p:style>
+        <p:txBody>
+          <a:bodyPr rtlCol="0" anchor="ctr"/>
+          <a:lstStyle/>
+          <a:p>
+            <a:pPr algn="ctr"/>
+          </a:p>
+        </p:txBody>
+      </p:sp>
+      <p:sp>
+        <p:nvSpPr>
+          <p:cNvPr id="6" name="Rectangle 5"/>
+          <p:cNvSpPr/>
+          <p:nvPr/>
+        </p:nvSpPr>
+        <p:spPr>
+          <a:xfrm>
+            <a:off x="777240" y="2606040"/>
+            <a:ext cx="3240938" cy="50292"/>
           </a:xfrm>
           <a:prstGeom prst="rect">
             <a:avLst/>
@@ -4180,14 +4265,14 @@
       </p:sp>
       <p:sp>
         <p:nvSpPr>
-          <p:cNvPr id="5" name="TextBox 4"/>
-          <p:cNvSpPr txBox="1"/>
-          <p:nvPr/>
-        </p:nvSpPr>
-        <p:spPr>
-          <a:xfrm>
-            <a:off x="996696" y="2286000"/>
-            <a:ext cx="10417759" cy="868680"/>
+          <p:cNvPr id="7" name="TextBox 6"/>
+          <p:cNvSpPr txBox="1"/>
+          <p:nvPr/>
+        </p:nvSpPr>
+        <p:spPr>
+          <a:xfrm>
+            <a:off x="1069848" y="2916936"/>
+            <a:ext cx="2655722" cy="1197864"/>
           </a:xfrm>
           <a:prstGeom prst="rect">
             <a:avLst/>
@@ -4205,17 +4290,17 @@
                 <a:spcPct val="122000"/>
               </a:lnSpc>
               <a:spcAft>
-                <a:spcPts val="500"/>
+                <a:spcPts val="700"/>
               </a:spcAft>
             </a:pPr>
             <a:r>
-              <a:rPr sz="1350" b="1">
+              <a:rPr sz="1400" b="1">
                 <a:solidFill>
                   <a:srgbClr val="1E242E"/>
                 </a:solidFill>
                 <a:latin typeface="Segoe UI"/>
               </a:rPr>
-              <a:t>Accounts are issued per engagement</a:t>
+              <a:t>Azure public cloud</a:t>
             </a:r>
           </a:p>
           <a:p>
@@ -4231,27 +4316,27 @@
                 </a:solidFill>
                 <a:latin typeface="Segoe UI"/>
               </a:rPr>
-              <a:t>PBKDF2-HMAC-SHA256 at 240,000 iterations with a per-account salt. Sessions expire after eight idle hours.</a:t>
-            </a:r>
-          </a:p>
-        </p:txBody>
-      </p:sp>
-      <p:sp>
-        <p:nvSpPr>
-          <p:cNvPr id="6" name="Rectangle 5"/>
+              <a:t>Native IaaS, PaaS, and Azure VMware Solution. Leaves the data centre.</a:t>
+            </a:r>
+          </a:p>
+        </p:txBody>
+      </p:sp>
+      <p:sp>
+        <p:nvSpPr>
+          <p:cNvPr id="8" name="Rounded Rectangle 7"/>
           <p:cNvSpPr/>
           <p:nvPr/>
         </p:nvSpPr>
         <p:spPr>
           <a:xfrm>
-            <a:off x="777240" y="3236976"/>
-            <a:ext cx="45720" cy="201168"/>
-          </a:xfrm>
-          <a:prstGeom prst="rect">
+            <a:off x="4475378" y="2606040"/>
+            <a:ext cx="3240938" cy="1783080"/>
+          </a:xfrm>
+          <a:prstGeom prst="roundRect">
             <a:avLst/>
           </a:prstGeom>
           <a:solidFill>
-            <a:srgbClr val="3B6FD4"/>
+            <a:srgbClr val="F5F7FB"/>
           </a:solidFill>
           <a:ln>
             <a:noFill/>
@@ -4282,78 +4367,20 @@
       </p:sp>
       <p:sp>
         <p:nvSpPr>
-          <p:cNvPr id="7" name="TextBox 6"/>
-          <p:cNvSpPr txBox="1"/>
-          <p:nvPr/>
-        </p:nvSpPr>
-        <p:spPr>
-          <a:xfrm>
-            <a:off x="996696" y="3154680"/>
-            <a:ext cx="10417759" cy="868680"/>
-          </a:xfrm>
-          <a:prstGeom prst="rect">
-            <a:avLst/>
-          </a:prstGeom>
-          <a:noFill/>
-        </p:spPr>
-        <p:txBody>
-          <a:bodyPr wrap="square" anchor="t" lIns="0" rIns="0" tIns="0" bIns="0">
-            <a:spAutoFit/>
-          </a:bodyPr>
-          <a:lstStyle/>
-          <a:p>
-            <a:pPr algn="l">
-              <a:lnSpc>
-                <a:spcPct val="122000"/>
-              </a:lnSpc>
-              <a:spcAft>
-                <a:spcPts val="500"/>
-              </a:spcAft>
-            </a:pPr>
-            <a:r>
-              <a:rPr sz="1350" b="1">
-                <a:solidFill>
-                  <a:srgbClr val="1E242E"/>
-                </a:solidFill>
-                <a:latin typeface="Segoe UI"/>
-              </a:rPr>
-              <a:t>Your inventory stays in the session</a:t>
-            </a:r>
-          </a:p>
-          <a:p>
-            <a:pPr algn="l">
-              <a:lnSpc>
-                <a:spcPct val="122000"/>
-              </a:lnSpc>
-            </a:pPr>
-            <a:r>
-              <a:rPr sz="1150" b="0">
-                <a:solidFill>
-                  <a:srgbClr val="5A6372"/>
-                </a:solidFill>
-                <a:latin typeface="Segoe UI"/>
-              </a:rPr>
-              <a:t>The uploaded file is held for the life of the browser session and written nowhere. Closing the tab discards it.</a:t>
-            </a:r>
-          </a:p>
-        </p:txBody>
-      </p:sp>
-      <p:sp>
-        <p:nvSpPr>
-          <p:cNvPr id="8" name="Rectangle 7"/>
+          <p:cNvPr id="9" name="Rectangle 8"/>
           <p:cNvSpPr/>
           <p:nvPr/>
         </p:nvSpPr>
         <p:spPr>
           <a:xfrm>
-            <a:off x="777240" y="4105656"/>
-            <a:ext cx="45720" cy="201168"/>
+            <a:off x="4475378" y="2606040"/>
+            <a:ext cx="3240938" cy="50292"/>
           </a:xfrm>
           <a:prstGeom prst="rect">
             <a:avLst/>
           </a:prstGeom>
           <a:solidFill>
-            <a:srgbClr val="3B6FD4"/>
+            <a:srgbClr val="7A5BC4"/>
           </a:solidFill>
           <a:ln>
             <a:noFill/>
@@ -4384,14 +4411,14 @@
       </p:sp>
       <p:sp>
         <p:nvSpPr>
-          <p:cNvPr id="9" name="TextBox 8"/>
-          <p:cNvSpPr txBox="1"/>
-          <p:nvPr/>
-        </p:nvSpPr>
-        <p:spPr>
-          <a:xfrm>
-            <a:off x="996696" y="4023360"/>
-            <a:ext cx="10417759" cy="868680"/>
+          <p:cNvPr id="10" name="TextBox 9"/>
+          <p:cNvSpPr txBox="1"/>
+          <p:nvPr/>
+        </p:nvSpPr>
+        <p:spPr>
+          <a:xfrm>
+            <a:off x="4767986" y="2916936"/>
+            <a:ext cx="2655722" cy="1197864"/>
           </a:xfrm>
           <a:prstGeom prst="rect">
             <a:avLst/>
@@ -4409,17 +4436,17 @@
                 <a:spcPct val="122000"/>
               </a:lnSpc>
               <a:spcAft>
-                <a:spcPts val="500"/>
+                <a:spcPts val="700"/>
               </a:spcAft>
             </a:pPr>
             <a:r>
-              <a:rPr sz="1350" b="1">
+              <a:rPr sz="1400" b="1">
                 <a:solidFill>
                   <a:srgbClr val="1E242E"/>
                 </a:solidFill>
                 <a:latin typeface="Segoe UI"/>
               </a:rPr>
-              <a:t>Nothing is sent to a vendor</a:t>
+              <a:t>Azure, in your data centre</a:t>
             </a:r>
           </a:p>
           <a:p>
@@ -4435,27 +4462,27 @@
                 </a:solidFill>
                 <a:latin typeface="Segoe UI"/>
               </a:rPr>
-              <a:t>Pricing calls ask for public rate cards by region and SKU. No estate data leaves the application.</a:t>
-            </a:r>
-          </a:p>
-        </p:txBody>
-      </p:sp>
-      <p:sp>
-        <p:nvSpPr>
-          <p:cNvPr id="10" name="Rectangle 9"/>
+              <a:t>Azure Local, Azure Stack Hub, or Azure Arc managing the estate where it is.</a:t>
+            </a:r>
+          </a:p>
+        </p:txBody>
+      </p:sp>
+      <p:sp>
+        <p:nvSpPr>
+          <p:cNvPr id="11" name="Rounded Rectangle 10"/>
           <p:cNvSpPr/>
           <p:nvPr/>
         </p:nvSpPr>
         <p:spPr>
           <a:xfrm>
-            <a:off x="777240" y="4974336"/>
-            <a:ext cx="45720" cy="201168"/>
-          </a:xfrm>
-          <a:prstGeom prst="rect">
+            <a:off x="8173516" y="2606040"/>
+            <a:ext cx="3240938" cy="1783080"/>
+          </a:xfrm>
+          <a:prstGeom prst="roundRect">
             <a:avLst/>
           </a:prstGeom>
           <a:solidFill>
-            <a:srgbClr val="3B6FD4"/>
+            <a:srgbClr val="F5F7FB"/>
           </a:solidFill>
           <a:ln>
             <a:noFill/>
@@ -4486,14 +4513,58 @@
       </p:sp>
       <p:sp>
         <p:nvSpPr>
-          <p:cNvPr id="11" name="TextBox 10"/>
-          <p:cNvSpPr txBox="1"/>
-          <p:nvPr/>
-        </p:nvSpPr>
-        <p:spPr>
-          <a:xfrm>
-            <a:off x="996696" y="4892040"/>
-            <a:ext cx="10417759" cy="868680"/>
+          <p:cNvPr id="12" name="Rectangle 11"/>
+          <p:cNvSpPr/>
+          <p:nvPr/>
+        </p:nvSpPr>
+        <p:spPr>
+          <a:xfrm>
+            <a:off x="8173516" y="2606040"/>
+            <a:ext cx="3240938" cy="50292"/>
+          </a:xfrm>
+          <a:prstGeom prst="rect">
+            <a:avLst/>
+          </a:prstGeom>
+          <a:solidFill>
+            <a:srgbClr val="2E8FA3"/>
+          </a:solidFill>
+          <a:ln>
+            <a:noFill/>
+          </a:ln>
+          <a:effectLst/>
+        </p:spPr>
+        <p:style>
+          <a:lnRef idx="1">
+            <a:schemeClr val="accent1"/>
+          </a:lnRef>
+          <a:fillRef idx="3">
+            <a:schemeClr val="accent1"/>
+          </a:fillRef>
+          <a:effectRef idx="2">
+            <a:schemeClr val="accent1"/>
+          </a:effectRef>
+          <a:fontRef idx="minor">
+            <a:schemeClr val="lt1"/>
+          </a:fontRef>
+        </p:style>
+        <p:txBody>
+          <a:bodyPr rtlCol="0" anchor="ctr"/>
+          <a:lstStyle/>
+          <a:p>
+            <a:pPr algn="ctr"/>
+          </a:p>
+        </p:txBody>
+      </p:sp>
+      <p:sp>
+        <p:nvSpPr>
+          <p:cNvPr id="13" name="TextBox 12"/>
+          <p:cNvSpPr txBox="1"/>
+          <p:nvPr/>
+        </p:nvSpPr>
+        <p:spPr>
+          <a:xfrm>
+            <a:off x="8466124" y="2916936"/>
+            <a:ext cx="2655722" cy="1197864"/>
           </a:xfrm>
           <a:prstGeom prst="rect">
             <a:avLst/>
@@ -4511,17 +4582,17 @@
                 <a:spcPct val="122000"/>
               </a:lnSpc>
               <a:spcAft>
-                <a:spcPts val="500"/>
+                <a:spcPts val="700"/>
               </a:spcAft>
             </a:pPr>
             <a:r>
-              <a:rPr sz="1350" b="1">
+              <a:rPr sz="1400" b="1">
                 <a:solidFill>
                   <a:srgbClr val="1E242E"/>
                 </a:solidFill>
                 <a:latin typeface="Segoe UI"/>
               </a:rPr>
-              <a:t>Everything is exportable</a:t>
+              <a:t>Another public cloud</a:t>
             </a:r>
           </a:p>
           <a:p>
@@ -4537,14 +4608,452 @@
                 </a:solidFill>
                 <a:latin typeface="Segoe UI"/>
               </a:rPr>
-              <a:t>Every table downloads as CSV, so the analysis can be reviewed in your own tooling rather than taken on trust.</a:t>
-            </a:r>
-          </a:p>
-        </p:txBody>
-      </p:sp>
-      <p:sp>
-        <p:nvSpPr>
-          <p:cNvPr id="12" name="TextBox 11"/>
+              <a:t>Google Cloud VMware Engine, Oracle Cloud VMware Solution and OCI native.</a:t>
+            </a:r>
+          </a:p>
+        </p:txBody>
+      </p:sp>
+      <p:sp>
+        <p:nvSpPr>
+          <p:cNvPr id="14" name="Rounded Rectangle 13"/>
+          <p:cNvSpPr/>
+          <p:nvPr/>
+        </p:nvSpPr>
+        <p:spPr>
+          <a:xfrm>
+            <a:off x="777240" y="4617720"/>
+            <a:ext cx="3240938" cy="1783080"/>
+          </a:xfrm>
+          <a:prstGeom prst="roundRect">
+            <a:avLst/>
+          </a:prstGeom>
+          <a:solidFill>
+            <a:srgbClr val="F5F7FB"/>
+          </a:solidFill>
+          <a:ln>
+            <a:noFill/>
+          </a:ln>
+          <a:effectLst/>
+        </p:spPr>
+        <p:style>
+          <a:lnRef idx="1">
+            <a:schemeClr val="accent1"/>
+          </a:lnRef>
+          <a:fillRef idx="3">
+            <a:schemeClr val="accent1"/>
+          </a:fillRef>
+          <a:effectRef idx="2">
+            <a:schemeClr val="accent1"/>
+          </a:effectRef>
+          <a:fontRef idx="minor">
+            <a:schemeClr val="lt1"/>
+          </a:fontRef>
+        </p:style>
+        <p:txBody>
+          <a:bodyPr rtlCol="0" anchor="ctr"/>
+          <a:lstStyle/>
+          <a:p>
+            <a:pPr algn="ctr"/>
+          </a:p>
+        </p:txBody>
+      </p:sp>
+      <p:sp>
+        <p:nvSpPr>
+          <p:cNvPr id="15" name="Rectangle 14"/>
+          <p:cNvSpPr/>
+          <p:nvPr/>
+        </p:nvSpPr>
+        <p:spPr>
+          <a:xfrm>
+            <a:off x="777240" y="4617720"/>
+            <a:ext cx="3240938" cy="50292"/>
+          </a:xfrm>
+          <a:prstGeom prst="rect">
+            <a:avLst/>
+          </a:prstGeom>
+          <a:solidFill>
+            <a:srgbClr val="E08A2E"/>
+          </a:solidFill>
+          <a:ln>
+            <a:noFill/>
+          </a:ln>
+          <a:effectLst/>
+        </p:spPr>
+        <p:style>
+          <a:lnRef idx="1">
+            <a:schemeClr val="accent1"/>
+          </a:lnRef>
+          <a:fillRef idx="3">
+            <a:schemeClr val="accent1"/>
+          </a:fillRef>
+          <a:effectRef idx="2">
+            <a:schemeClr val="accent1"/>
+          </a:effectRef>
+          <a:fontRef idx="minor">
+            <a:schemeClr val="lt1"/>
+          </a:fontRef>
+        </p:style>
+        <p:txBody>
+          <a:bodyPr rtlCol="0" anchor="ctr"/>
+          <a:lstStyle/>
+          <a:p>
+            <a:pPr algn="ctr"/>
+          </a:p>
+        </p:txBody>
+      </p:sp>
+      <p:sp>
+        <p:nvSpPr>
+          <p:cNvPr id="16" name="TextBox 15"/>
+          <p:cNvSpPr txBox="1"/>
+          <p:nvPr/>
+        </p:nvSpPr>
+        <p:spPr>
+          <a:xfrm>
+            <a:off x="1069848" y="4928616"/>
+            <a:ext cx="2655722" cy="1197864"/>
+          </a:xfrm>
+          <a:prstGeom prst="rect">
+            <a:avLst/>
+          </a:prstGeom>
+          <a:noFill/>
+        </p:spPr>
+        <p:txBody>
+          <a:bodyPr wrap="square" anchor="t" lIns="0" rIns="0" tIns="0" bIns="0">
+            <a:spAutoFit/>
+          </a:bodyPr>
+          <a:lstStyle/>
+          <a:p>
+            <a:pPr algn="l">
+              <a:lnSpc>
+                <a:spcPct val="122000"/>
+              </a:lnSpc>
+              <a:spcAft>
+                <a:spcPts val="700"/>
+              </a:spcAft>
+            </a:pPr>
+            <a:r>
+              <a:rPr sz="1400" b="1">
+                <a:solidFill>
+                  <a:srgbClr val="1E242E"/>
+                </a:solidFill>
+                <a:latin typeface="Segoe UI"/>
+              </a:rPr>
+              <a:t>A different hypervisor, same racks</a:t>
+            </a:r>
+          </a:p>
+          <a:p>
+            <a:pPr algn="l">
+              <a:lnSpc>
+                <a:spcPct val="122000"/>
+              </a:lnSpc>
+            </a:pPr>
+            <a:r>
+              <a:rPr sz="1150" b="0">
+                <a:solidFill>
+                  <a:srgbClr val="5A6372"/>
+                </a:solidFill>
+                <a:latin typeface="Segoe UI"/>
+              </a:rPr>
+              <a:t>Hyper-V with SCVMM, Nutanix AHV, OpenShift Virtualization, Proxmox VE. New licence, same building.</a:t>
+            </a:r>
+          </a:p>
+        </p:txBody>
+      </p:sp>
+      <p:sp>
+        <p:nvSpPr>
+          <p:cNvPr id="17" name="Rounded Rectangle 16"/>
+          <p:cNvSpPr/>
+          <p:nvPr/>
+        </p:nvSpPr>
+        <p:spPr>
+          <a:xfrm>
+            <a:off x="4475378" y="4617720"/>
+            <a:ext cx="3240938" cy="1783080"/>
+          </a:xfrm>
+          <a:prstGeom prst="roundRect">
+            <a:avLst/>
+          </a:prstGeom>
+          <a:solidFill>
+            <a:srgbClr val="F5F7FB"/>
+          </a:solidFill>
+          <a:ln>
+            <a:noFill/>
+          </a:ln>
+          <a:effectLst/>
+        </p:spPr>
+        <p:style>
+          <a:lnRef idx="1">
+            <a:schemeClr val="accent1"/>
+          </a:lnRef>
+          <a:fillRef idx="3">
+            <a:schemeClr val="accent1"/>
+          </a:fillRef>
+          <a:effectRef idx="2">
+            <a:schemeClr val="accent1"/>
+          </a:effectRef>
+          <a:fontRef idx="minor">
+            <a:schemeClr val="lt1"/>
+          </a:fontRef>
+        </p:style>
+        <p:txBody>
+          <a:bodyPr rtlCol="0" anchor="ctr"/>
+          <a:lstStyle/>
+          <a:p>
+            <a:pPr algn="ctr"/>
+          </a:p>
+        </p:txBody>
+      </p:sp>
+      <p:sp>
+        <p:nvSpPr>
+          <p:cNvPr id="18" name="Rectangle 17"/>
+          <p:cNvSpPr/>
+          <p:nvPr/>
+        </p:nvSpPr>
+        <p:spPr>
+          <a:xfrm>
+            <a:off x="4475378" y="4617720"/>
+            <a:ext cx="3240938" cy="50292"/>
+          </a:xfrm>
+          <a:prstGeom prst="rect">
+            <a:avLst/>
+          </a:prstGeom>
+          <a:solidFill>
+            <a:srgbClr val="2F9E68"/>
+          </a:solidFill>
+          <a:ln>
+            <a:noFill/>
+          </a:ln>
+          <a:effectLst/>
+        </p:spPr>
+        <p:style>
+          <a:lnRef idx="1">
+            <a:schemeClr val="accent1"/>
+          </a:lnRef>
+          <a:fillRef idx="3">
+            <a:schemeClr val="accent1"/>
+          </a:fillRef>
+          <a:effectRef idx="2">
+            <a:schemeClr val="accent1"/>
+          </a:effectRef>
+          <a:fontRef idx="minor">
+            <a:schemeClr val="lt1"/>
+          </a:fontRef>
+        </p:style>
+        <p:txBody>
+          <a:bodyPr rtlCol="0" anchor="ctr"/>
+          <a:lstStyle/>
+          <a:p>
+            <a:pPr algn="ctr"/>
+          </a:p>
+        </p:txBody>
+      </p:sp>
+      <p:sp>
+        <p:nvSpPr>
+          <p:cNvPr id="19" name="TextBox 18"/>
+          <p:cNvSpPr txBox="1"/>
+          <p:nvPr/>
+        </p:nvSpPr>
+        <p:spPr>
+          <a:xfrm>
+            <a:off x="4767986" y="4928616"/>
+            <a:ext cx="2655722" cy="1197864"/>
+          </a:xfrm>
+          <a:prstGeom prst="rect">
+            <a:avLst/>
+          </a:prstGeom>
+          <a:noFill/>
+        </p:spPr>
+        <p:txBody>
+          <a:bodyPr wrap="square" anchor="t" lIns="0" rIns="0" tIns="0" bIns="0">
+            <a:spAutoFit/>
+          </a:bodyPr>
+          <a:lstStyle/>
+          <a:p>
+            <a:pPr algn="l">
+              <a:lnSpc>
+                <a:spcPct val="122000"/>
+              </a:lnSpc>
+              <a:spcAft>
+                <a:spcPts val="700"/>
+              </a:spcAft>
+            </a:pPr>
+            <a:r>
+              <a:rPr sz="1400" b="1">
+                <a:solidFill>
+                  <a:srgbClr val="1E242E"/>
+                </a:solidFill>
+                <a:latin typeface="Segoe UI"/>
+              </a:rPr>
+              <a:t>Hybrid bare metal</a:t>
+            </a:r>
+          </a:p>
+          <a:p>
+            <a:pPr algn="l">
+              <a:lnSpc>
+                <a:spcPct val="122000"/>
+              </a:lnSpc>
+            </a:pPr>
+            <a:r>
+              <a:rPr sz="1150" b="0">
+                <a:solidFill>
+                  <a:srgbClr val="5A6372"/>
+                </a:solidFill>
+                <a:latin typeface="Segoe UI"/>
+              </a:rPr>
+              <a:t>Nutanix Cloud Clusters on Azure: the same stack in a cloud region, on-premises, or both.</a:t>
+            </a:r>
+          </a:p>
+        </p:txBody>
+      </p:sp>
+      <p:sp>
+        <p:nvSpPr>
+          <p:cNvPr id="20" name="Rounded Rectangle 19"/>
+          <p:cNvSpPr/>
+          <p:nvPr/>
+        </p:nvSpPr>
+        <p:spPr>
+          <a:xfrm>
+            <a:off x="8173516" y="4617720"/>
+            <a:ext cx="3240938" cy="1783080"/>
+          </a:xfrm>
+          <a:prstGeom prst="roundRect">
+            <a:avLst/>
+          </a:prstGeom>
+          <a:solidFill>
+            <a:srgbClr val="F5F7FB"/>
+          </a:solidFill>
+          <a:ln>
+            <a:noFill/>
+          </a:ln>
+          <a:effectLst/>
+        </p:spPr>
+        <p:style>
+          <a:lnRef idx="1">
+            <a:schemeClr val="accent1"/>
+          </a:lnRef>
+          <a:fillRef idx="3">
+            <a:schemeClr val="accent1"/>
+          </a:fillRef>
+          <a:effectRef idx="2">
+            <a:schemeClr val="accent1"/>
+          </a:effectRef>
+          <a:fontRef idx="minor">
+            <a:schemeClr val="lt1"/>
+          </a:fontRef>
+        </p:style>
+        <p:txBody>
+          <a:bodyPr rtlCol="0" anchor="ctr"/>
+          <a:lstStyle/>
+          <a:p>
+            <a:pPr algn="ctr"/>
+          </a:p>
+        </p:txBody>
+      </p:sp>
+      <p:sp>
+        <p:nvSpPr>
+          <p:cNvPr id="21" name="Rectangle 20"/>
+          <p:cNvSpPr/>
+          <p:nvPr/>
+        </p:nvSpPr>
+        <p:spPr>
+          <a:xfrm>
+            <a:off x="8173516" y="4617720"/>
+            <a:ext cx="3240938" cy="50292"/>
+          </a:xfrm>
+          <a:prstGeom prst="rect">
+            <a:avLst/>
+          </a:prstGeom>
+          <a:solidFill>
+            <a:srgbClr val="C4485E"/>
+          </a:solidFill>
+          <a:ln>
+            <a:noFill/>
+          </a:ln>
+          <a:effectLst/>
+        </p:spPr>
+        <p:style>
+          <a:lnRef idx="1">
+            <a:schemeClr val="accent1"/>
+          </a:lnRef>
+          <a:fillRef idx="3">
+            <a:schemeClr val="accent1"/>
+          </a:fillRef>
+          <a:effectRef idx="2">
+            <a:schemeClr val="accent1"/>
+          </a:effectRef>
+          <a:fontRef idx="minor">
+            <a:schemeClr val="lt1"/>
+          </a:fontRef>
+        </p:style>
+        <p:txBody>
+          <a:bodyPr rtlCol="0" anchor="ctr"/>
+          <a:lstStyle/>
+          <a:p>
+            <a:pPr algn="ctr"/>
+          </a:p>
+        </p:txBody>
+      </p:sp>
+      <p:sp>
+        <p:nvSpPr>
+          <p:cNvPr id="22" name="TextBox 21"/>
+          <p:cNvSpPr txBox="1"/>
+          <p:nvPr/>
+        </p:nvSpPr>
+        <p:spPr>
+          <a:xfrm>
+            <a:off x="8466124" y="4928616"/>
+            <a:ext cx="2655722" cy="1197864"/>
+          </a:xfrm>
+          <a:prstGeom prst="rect">
+            <a:avLst/>
+          </a:prstGeom>
+          <a:noFill/>
+        </p:spPr>
+        <p:txBody>
+          <a:bodyPr wrap="square" anchor="t" lIns="0" rIns="0" tIns="0" bIns="0">
+            <a:spAutoFit/>
+          </a:bodyPr>
+          <a:lstStyle/>
+          <a:p>
+            <a:pPr algn="l">
+              <a:lnSpc>
+                <a:spcPct val="122000"/>
+              </a:lnSpc>
+              <a:spcAft>
+                <a:spcPts val="700"/>
+              </a:spcAft>
+            </a:pPr>
+            <a:r>
+              <a:rPr sz="1400" b="1">
+                <a:solidFill>
+                  <a:srgbClr val="1E242E"/>
+                </a:solidFill>
+                <a:latin typeface="Segoe UI"/>
+              </a:rPr>
+              <a:t>Stay, and renegotiate</a:t>
+            </a:r>
+          </a:p>
+          <a:p>
+            <a:pPr algn="l">
+              <a:lnSpc>
+                <a:spcPct val="122000"/>
+              </a:lnSpc>
+            </a:pPr>
+            <a:r>
+              <a:rPr sz="1150" b="0">
+                <a:solidFill>
+                  <a:srgbClr val="5A6372"/>
+                </a:solidFill>
+                <a:latin typeface="Segoe UI"/>
+              </a:rPr>
+              <a:t>VCF 9 on a renewed contract. Modelled as a real option, because sometimes it wins.</a:t>
+            </a:r>
+          </a:p>
+        </p:txBody>
+      </p:sp>
+      <p:sp>
+        <p:nvSpPr>
+          <p:cNvPr id="23" name="TextBox 22"/>
           <p:cNvSpPr txBox="1"/>
           <p:nvPr/>
         </p:nvSpPr>
@@ -4583,7 +5092,7 @@
       </p:sp>
       <p:sp>
         <p:nvSpPr>
-          <p:cNvPr id="13" name="TextBox 12"/>
+          <p:cNvPr id="24" name="TextBox 23"/>
           <p:cNvSpPr txBox="1"/>
           <p:nvPr/>
         </p:nvSpPr>
@@ -4629,6 +5138,1588 @@
 </file>
 
 <file path=ppt/slides/slide12.xml><?xml version="1.0" encoding="utf-8"?>
+<p:sld xmlns:a="http://schemas.openxmlformats.org/drawingml/2006/main" xmlns:p="http://schemas.openxmlformats.org/presentationml/2006/main" xmlns:r="http://schemas.openxmlformats.org/officeDocument/2006/relationships">
+  <p:cSld>
+    <p:bg>
+      <p:bgPr>
+        <a:solidFill>
+          <a:srgbClr val="FFFFFF"/>
+        </a:solidFill>
+        <a:effectLst/>
+      </p:bgPr>
+    </p:bg>
+    <p:spTree>
+      <p:nvGrpSpPr>
+        <p:cNvPr id="1" name=""/>
+        <p:cNvGrpSpPr/>
+        <p:nvPr/>
+      </p:nvGrpSpPr>
+      <p:grpSpPr/>
+      <p:sp>
+        <p:nvSpPr>
+          <p:cNvPr id="2" name="TextBox 1"/>
+          <p:cNvSpPr txBox="1"/>
+          <p:nvPr/>
+        </p:nvSpPr>
+        <p:spPr>
+          <a:xfrm>
+            <a:off x="777240" y="566928"/>
+            <a:ext cx="10637215" cy="274320"/>
+          </a:xfrm>
+          <a:prstGeom prst="rect">
+            <a:avLst/>
+          </a:prstGeom>
+          <a:noFill/>
+        </p:spPr>
+        <p:txBody>
+          <a:bodyPr wrap="square" anchor="t" lIns="0" rIns="0" tIns="0" bIns="0">
+            <a:spAutoFit/>
+          </a:bodyPr>
+          <a:lstStyle/>
+          <a:p>
+            <a:pPr algn="l">
+              <a:lnSpc>
+                <a:spcPct val="100000"/>
+              </a:lnSpc>
+            </a:pPr>
+            <a:r>
+              <a:rPr sz="1100" b="1">
+                <a:solidFill>
+                  <a:srgbClr val="3B6FD4"/>
+                </a:solidFill>
+                <a:latin typeface="Segoe UI"/>
+              </a:rPr>
+              <a:t>WHICH IS BETTER</a:t>
+            </a:r>
+          </a:p>
+        </p:txBody>
+      </p:sp>
+      <p:sp>
+        <p:nvSpPr>
+          <p:cNvPr id="3" name="TextBox 2"/>
+          <p:cNvSpPr txBox="1"/>
+          <p:nvPr/>
+        </p:nvSpPr>
+        <p:spPr>
+          <a:xfrm>
+            <a:off x="777240" y="932688"/>
+            <a:ext cx="10637215" cy="777240"/>
+          </a:xfrm>
+          <a:prstGeom prst="rect">
+            <a:avLst/>
+          </a:prstGeom>
+          <a:noFill/>
+        </p:spPr>
+        <p:txBody>
+          <a:bodyPr wrap="square" anchor="t" lIns="0" rIns="0" tIns="0" bIns="0">
+            <a:spAutoFit/>
+          </a:bodyPr>
+          <a:lstStyle/>
+          <a:p>
+            <a:pPr algn="l">
+              <a:lnSpc>
+                <a:spcPct val="100000"/>
+              </a:lnSpc>
+            </a:pPr>
+            <a:r>
+              <a:rPr sz="3200" b="1">
+                <a:solidFill>
+                  <a:srgbClr val="1E242E"/>
+                </a:solidFill>
+                <a:latin typeface="Segoe UI"/>
+              </a:rPr>
+              <a:t>It changes with what you are optimising for</a:t>
+            </a:r>
+          </a:p>
+        </p:txBody>
+      </p:sp>
+      <p:sp>
+        <p:nvSpPr>
+          <p:cNvPr id="4" name="TextBox 3"/>
+          <p:cNvSpPr txBox="1"/>
+          <p:nvPr/>
+        </p:nvSpPr>
+        <p:spPr>
+          <a:xfrm>
+            <a:off x="777240" y="1700784"/>
+            <a:ext cx="8778240" cy="640080"/>
+          </a:xfrm>
+          <a:prstGeom prst="rect">
+            <a:avLst/>
+          </a:prstGeom>
+          <a:noFill/>
+        </p:spPr>
+        <p:txBody>
+          <a:bodyPr wrap="square" anchor="t" lIns="0" rIns="0" tIns="0" bIns="0">
+            <a:spAutoFit/>
+          </a:bodyPr>
+          <a:lstStyle/>
+          <a:p>
+            <a:pPr algn="l">
+              <a:lnSpc>
+                <a:spcPct val="125000"/>
+              </a:lnSpc>
+            </a:pPr>
+            <a:r>
+              <a:rPr sz="1400" b="0">
+                <a:solidFill>
+                  <a:srgbClr val="5A6372"/>
+                </a:solidFill>
+                <a:latin typeface="Segoe UI"/>
+              </a:rPr>
+              <a:t>These are fit scores from Ascend's own ranking engine. Set the priority and the winner moves — which is the honest answer, and the reason the tool exists.</a:t>
+            </a:r>
+          </a:p>
+        </p:txBody>
+      </p:sp>
+      <p:sp>
+        <p:nvSpPr>
+          <p:cNvPr id="5" name="Rectangle 4"/>
+          <p:cNvSpPr/>
+          <p:nvPr/>
+        </p:nvSpPr>
+        <p:spPr>
+          <a:xfrm>
+            <a:off x="777240" y="2651760"/>
+            <a:ext cx="45720" cy="566928"/>
+          </a:xfrm>
+          <a:prstGeom prst="rect">
+            <a:avLst/>
+          </a:prstGeom>
+          <a:solidFill>
+            <a:srgbClr val="3B6FD4"/>
+          </a:solidFill>
+          <a:ln>
+            <a:noFill/>
+          </a:ln>
+          <a:effectLst/>
+        </p:spPr>
+        <p:style>
+          <a:lnRef idx="1">
+            <a:schemeClr val="accent1"/>
+          </a:lnRef>
+          <a:fillRef idx="3">
+            <a:schemeClr val="accent1"/>
+          </a:fillRef>
+          <a:effectRef idx="2">
+            <a:schemeClr val="accent1"/>
+          </a:effectRef>
+          <a:fontRef idx="minor">
+            <a:schemeClr val="lt1"/>
+          </a:fontRef>
+        </p:style>
+        <p:txBody>
+          <a:bodyPr rtlCol="0" anchor="ctr"/>
+          <a:lstStyle/>
+          <a:p>
+            <a:pPr algn="ctr"/>
+          </a:p>
+        </p:txBody>
+      </p:sp>
+      <p:sp>
+        <p:nvSpPr>
+          <p:cNvPr id="6" name="TextBox 5"/>
+          <p:cNvSpPr txBox="1"/>
+          <p:nvPr/>
+        </p:nvSpPr>
+        <p:spPr>
+          <a:xfrm>
+            <a:off x="978408" y="2651760"/>
+            <a:ext cx="3200400" cy="365760"/>
+          </a:xfrm>
+          <a:prstGeom prst="rect">
+            <a:avLst/>
+          </a:prstGeom>
+          <a:noFill/>
+        </p:spPr>
+        <p:txBody>
+          <a:bodyPr wrap="square" anchor="t" lIns="0" rIns="0" tIns="0" bIns="0">
+            <a:spAutoFit/>
+          </a:bodyPr>
+          <a:lstStyle/>
+          <a:p>
+            <a:pPr algn="l">
+              <a:lnSpc>
+                <a:spcPct val="115000"/>
+              </a:lnSpc>
+            </a:pPr>
+            <a:r>
+              <a:rPr sz="1350" b="1">
+                <a:solidFill>
+                  <a:srgbClr val="1E242E"/>
+                </a:solidFill>
+                <a:latin typeface="Segoe UI"/>
+              </a:rPr>
+              <a:t>Exit the data centre on a deadline</a:t>
+            </a:r>
+          </a:p>
+        </p:txBody>
+      </p:sp>
+      <p:sp>
+        <p:nvSpPr>
+          <p:cNvPr id="7" name="TextBox 6"/>
+          <p:cNvSpPr txBox="1"/>
+          <p:nvPr/>
+        </p:nvSpPr>
+        <p:spPr>
+          <a:xfrm>
+            <a:off x="4389120" y="2651760"/>
+            <a:ext cx="2286000" cy="365760"/>
+          </a:xfrm>
+          <a:prstGeom prst="rect">
+            <a:avLst/>
+          </a:prstGeom>
+          <a:noFill/>
+        </p:spPr>
+        <p:txBody>
+          <a:bodyPr wrap="square" anchor="t" lIns="0" rIns="0" tIns="0" bIns="0">
+            <a:spAutoFit/>
+          </a:bodyPr>
+          <a:lstStyle/>
+          <a:p>
+            <a:pPr algn="l">
+              <a:lnSpc>
+                <a:spcPct val="100000"/>
+              </a:lnSpc>
+            </a:pPr>
+            <a:r>
+              <a:rPr sz="1350" b="1">
+                <a:solidFill>
+                  <a:srgbClr val="3B6FD4"/>
+                </a:solidFill>
+                <a:latin typeface="Segoe UI"/>
+              </a:rPr>
+              <a:t>Azure native IaaS  80</a:t>
+            </a:r>
+          </a:p>
+        </p:txBody>
+      </p:sp>
+      <p:sp>
+        <p:nvSpPr>
+          <p:cNvPr id="8" name="TextBox 7"/>
+          <p:cNvSpPr txBox="1"/>
+          <p:nvPr/>
+        </p:nvSpPr>
+        <p:spPr>
+          <a:xfrm>
+            <a:off x="6812280" y="2633472"/>
+            <a:ext cx="4480560" cy="640080"/>
+          </a:xfrm>
+          <a:prstGeom prst="rect">
+            <a:avLst/>
+          </a:prstGeom>
+          <a:noFill/>
+        </p:spPr>
+        <p:txBody>
+          <a:bodyPr wrap="square" anchor="t" lIns="0" rIns="0" tIns="0" bIns="0">
+            <a:spAutoFit/>
+          </a:bodyPr>
+          <a:lstStyle/>
+          <a:p>
+            <a:pPr algn="l">
+              <a:lnSpc>
+                <a:spcPct val="120000"/>
+              </a:lnSpc>
+            </a:pPr>
+            <a:r>
+              <a:rPr sz="1150" b="0">
+                <a:solidFill>
+                  <a:srgbClr val="5A6372"/>
+                </a:solidFill>
+                <a:latin typeface="Segoe UI"/>
+              </a:rPr>
+              <a:t>AVS 74 is the faster exit, but it is sized by memory and lands only ~5% below staying on VMware.</a:t>
+            </a:r>
+          </a:p>
+        </p:txBody>
+      </p:sp>
+      <p:sp>
+        <p:nvSpPr>
+          <p:cNvPr id="9" name="Rectangle 8"/>
+          <p:cNvSpPr/>
+          <p:nvPr/>
+        </p:nvSpPr>
+        <p:spPr>
+          <a:xfrm>
+            <a:off x="777240" y="3493008"/>
+            <a:ext cx="45720" cy="566928"/>
+          </a:xfrm>
+          <a:prstGeom prst="rect">
+            <a:avLst/>
+          </a:prstGeom>
+          <a:solidFill>
+            <a:srgbClr val="2F9E68"/>
+          </a:solidFill>
+          <a:ln>
+            <a:noFill/>
+          </a:ln>
+          <a:effectLst/>
+        </p:spPr>
+        <p:style>
+          <a:lnRef idx="1">
+            <a:schemeClr val="accent1"/>
+          </a:lnRef>
+          <a:fillRef idx="3">
+            <a:schemeClr val="accent1"/>
+          </a:fillRef>
+          <a:effectRef idx="2">
+            <a:schemeClr val="accent1"/>
+          </a:effectRef>
+          <a:fontRef idx="minor">
+            <a:schemeClr val="lt1"/>
+          </a:fontRef>
+        </p:style>
+        <p:txBody>
+          <a:bodyPr rtlCol="0" anchor="ctr"/>
+          <a:lstStyle/>
+          <a:p>
+            <a:pPr algn="ctr"/>
+          </a:p>
+        </p:txBody>
+      </p:sp>
+      <p:sp>
+        <p:nvSpPr>
+          <p:cNvPr id="10" name="TextBox 9"/>
+          <p:cNvSpPr txBox="1"/>
+          <p:nvPr/>
+        </p:nvSpPr>
+        <p:spPr>
+          <a:xfrm>
+            <a:off x="978408" y="3493008"/>
+            <a:ext cx="3200400" cy="365760"/>
+          </a:xfrm>
+          <a:prstGeom prst="rect">
+            <a:avLst/>
+          </a:prstGeom>
+          <a:noFill/>
+        </p:spPr>
+        <p:txBody>
+          <a:bodyPr wrap="square" anchor="t" lIns="0" rIns="0" tIns="0" bIns="0">
+            <a:spAutoFit/>
+          </a:bodyPr>
+          <a:lstStyle/>
+          <a:p>
+            <a:pPr algn="l">
+              <a:lnSpc>
+                <a:spcPct val="115000"/>
+              </a:lnSpc>
+            </a:pPr>
+            <a:r>
+              <a:rPr sz="1350" b="1">
+                <a:solidFill>
+                  <a:srgbClr val="1E242E"/>
+                </a:solidFill>
+                <a:latin typeface="Segoe UI"/>
+              </a:rPr>
+              <a:t>Cut total cost of ownership</a:t>
+            </a:r>
+          </a:p>
+        </p:txBody>
+      </p:sp>
+      <p:sp>
+        <p:nvSpPr>
+          <p:cNvPr id="11" name="TextBox 10"/>
+          <p:cNvSpPr txBox="1"/>
+          <p:nvPr/>
+        </p:nvSpPr>
+        <p:spPr>
+          <a:xfrm>
+            <a:off x="4389120" y="3493008"/>
+            <a:ext cx="2286000" cy="365760"/>
+          </a:xfrm>
+          <a:prstGeom prst="rect">
+            <a:avLst/>
+          </a:prstGeom>
+          <a:noFill/>
+        </p:spPr>
+        <p:txBody>
+          <a:bodyPr wrap="square" anchor="t" lIns="0" rIns="0" tIns="0" bIns="0">
+            <a:spAutoFit/>
+          </a:bodyPr>
+          <a:lstStyle/>
+          <a:p>
+            <a:pPr algn="l">
+              <a:lnSpc>
+                <a:spcPct val="100000"/>
+              </a:lnSpc>
+            </a:pPr>
+            <a:r>
+              <a:rPr sz="1350" b="1">
+                <a:solidFill>
+                  <a:srgbClr val="2F9E68"/>
+                </a:solidFill>
+                <a:latin typeface="Segoe UI"/>
+              </a:rPr>
+              <a:t>Azure native IaaS  80</a:t>
+            </a:r>
+          </a:p>
+        </p:txBody>
+      </p:sp>
+      <p:sp>
+        <p:nvSpPr>
+          <p:cNvPr id="12" name="TextBox 11"/>
+          <p:cNvSpPr txBox="1"/>
+          <p:nvPr/>
+        </p:nvSpPr>
+        <p:spPr>
+          <a:xfrm>
+            <a:off x="6812280" y="3474720"/>
+            <a:ext cx="4480560" cy="640080"/>
+          </a:xfrm>
+          <a:prstGeom prst="rect">
+            <a:avLst/>
+          </a:prstGeom>
+          <a:noFill/>
+        </p:spPr>
+        <p:txBody>
+          <a:bodyPr wrap="square" anchor="t" lIns="0" rIns="0" tIns="0" bIns="0">
+            <a:spAutoFit/>
+          </a:bodyPr>
+          <a:lstStyle/>
+          <a:p>
+            <a:pPr algn="l">
+              <a:lnSpc>
+                <a:spcPct val="120000"/>
+              </a:lnSpc>
+            </a:pPr>
+            <a:r>
+              <a:rPr sz="1150" b="0">
+                <a:solidFill>
+                  <a:srgbClr val="5A6372"/>
+                </a:solidFill>
+                <a:latin typeface="Segoe UI"/>
+              </a:rPr>
+              <a:t>PaaS scores 76 and runs cheaper still, but costs far more to get to. Rehost first, replatform after.</a:t>
+            </a:r>
+          </a:p>
+        </p:txBody>
+      </p:sp>
+      <p:sp>
+        <p:nvSpPr>
+          <p:cNvPr id="13" name="Rectangle 12"/>
+          <p:cNvSpPr/>
+          <p:nvPr/>
+        </p:nvSpPr>
+        <p:spPr>
+          <a:xfrm>
+            <a:off x="777240" y="4334256"/>
+            <a:ext cx="45720" cy="566928"/>
+          </a:xfrm>
+          <a:prstGeom prst="rect">
+            <a:avLst/>
+          </a:prstGeom>
+          <a:solidFill>
+            <a:srgbClr val="E08A2E"/>
+          </a:solidFill>
+          <a:ln>
+            <a:noFill/>
+          </a:ln>
+          <a:effectLst/>
+        </p:spPr>
+        <p:style>
+          <a:lnRef idx="1">
+            <a:schemeClr val="accent1"/>
+          </a:lnRef>
+          <a:fillRef idx="3">
+            <a:schemeClr val="accent1"/>
+          </a:fillRef>
+          <a:effectRef idx="2">
+            <a:schemeClr val="accent1"/>
+          </a:effectRef>
+          <a:fontRef idx="minor">
+            <a:schemeClr val="lt1"/>
+          </a:fontRef>
+        </p:style>
+        <p:txBody>
+          <a:bodyPr rtlCol="0" anchor="ctr"/>
+          <a:lstStyle/>
+          <a:p>
+            <a:pPr algn="ctr"/>
+          </a:p>
+        </p:txBody>
+      </p:sp>
+      <p:sp>
+        <p:nvSpPr>
+          <p:cNvPr id="14" name="TextBox 13"/>
+          <p:cNvSpPr txBox="1"/>
+          <p:nvPr/>
+        </p:nvSpPr>
+        <p:spPr>
+          <a:xfrm>
+            <a:off x="978408" y="4334256"/>
+            <a:ext cx="3200400" cy="365760"/>
+          </a:xfrm>
+          <a:prstGeom prst="rect">
+            <a:avLst/>
+          </a:prstGeom>
+          <a:noFill/>
+        </p:spPr>
+        <p:txBody>
+          <a:bodyPr wrap="square" anchor="t" lIns="0" rIns="0" tIns="0" bIns="0">
+            <a:spAutoFit/>
+          </a:bodyPr>
+          <a:lstStyle/>
+          <a:p>
+            <a:pPr algn="l">
+              <a:lnSpc>
+                <a:spcPct val="115000"/>
+              </a:lnSpc>
+            </a:pPr>
+            <a:r>
+              <a:rPr sz="1350" b="1">
+                <a:solidFill>
+                  <a:srgbClr val="1E242E"/>
+                </a:solidFill>
+                <a:latin typeface="Segoe UI"/>
+              </a:rPr>
+              <a:t>Escape Broadcom licensing</a:t>
+            </a:r>
+          </a:p>
+        </p:txBody>
+      </p:sp>
+      <p:sp>
+        <p:nvSpPr>
+          <p:cNvPr id="15" name="TextBox 14"/>
+          <p:cNvSpPr txBox="1"/>
+          <p:nvPr/>
+        </p:nvSpPr>
+        <p:spPr>
+          <a:xfrm>
+            <a:off x="4389120" y="4334256"/>
+            <a:ext cx="2286000" cy="365760"/>
+          </a:xfrm>
+          <a:prstGeom prst="rect">
+            <a:avLst/>
+          </a:prstGeom>
+          <a:noFill/>
+        </p:spPr>
+        <p:txBody>
+          <a:bodyPr wrap="square" anchor="t" lIns="0" rIns="0" tIns="0" bIns="0">
+            <a:spAutoFit/>
+          </a:bodyPr>
+          <a:lstStyle/>
+          <a:p>
+            <a:pPr algn="l">
+              <a:lnSpc>
+                <a:spcPct val="100000"/>
+              </a:lnSpc>
+            </a:pPr>
+            <a:r>
+              <a:rPr sz="1350" b="1">
+                <a:solidFill>
+                  <a:srgbClr val="E08A2E"/>
+                </a:solidFill>
+                <a:latin typeface="Segoe UI"/>
+              </a:rPr>
+              <a:t>Azure native IaaS  77</a:t>
+            </a:r>
+          </a:p>
+        </p:txBody>
+      </p:sp>
+      <p:sp>
+        <p:nvSpPr>
+          <p:cNvPr id="16" name="TextBox 15"/>
+          <p:cNvSpPr txBox="1"/>
+          <p:nvPr/>
+        </p:nvSpPr>
+        <p:spPr>
+          <a:xfrm>
+            <a:off x="6812280" y="4315968"/>
+            <a:ext cx="4480560" cy="640080"/>
+          </a:xfrm>
+          <a:prstGeom prst="rect">
+            <a:avLst/>
+          </a:prstGeom>
+          <a:noFill/>
+        </p:spPr>
+        <p:txBody>
+          <a:bodyPr wrap="square" anchor="t" lIns="0" rIns="0" tIns="0" bIns="0">
+            <a:spAutoFit/>
+          </a:bodyPr>
+          <a:lstStyle/>
+          <a:p>
+            <a:pPr algn="l">
+              <a:lnSpc>
+                <a:spcPct val="120000"/>
+              </a:lnSpc>
+            </a:pPr>
+            <a:r>
+              <a:rPr sz="1150" b="0">
+                <a:solidFill>
+                  <a:srgbClr val="5A6372"/>
+                </a:solidFill>
+                <a:latin typeface="Segoe UI"/>
+              </a:rPr>
+              <a:t>Hyper-V with SCVMM scores 73 and keeps the workloads on your own racks, if leaving the building is not the point.</a:t>
+            </a:r>
+          </a:p>
+        </p:txBody>
+      </p:sp>
+      <p:sp>
+        <p:nvSpPr>
+          <p:cNvPr id="17" name="Rectangle 16"/>
+          <p:cNvSpPr/>
+          <p:nvPr/>
+        </p:nvSpPr>
+        <p:spPr>
+          <a:xfrm>
+            <a:off x="777240" y="5175504"/>
+            <a:ext cx="45720" cy="566928"/>
+          </a:xfrm>
+          <a:prstGeom prst="rect">
+            <a:avLst/>
+          </a:prstGeom>
+          <a:solidFill>
+            <a:srgbClr val="7A5BC4"/>
+          </a:solidFill>
+          <a:ln>
+            <a:noFill/>
+          </a:ln>
+          <a:effectLst/>
+        </p:spPr>
+        <p:style>
+          <a:lnRef idx="1">
+            <a:schemeClr val="accent1"/>
+          </a:lnRef>
+          <a:fillRef idx="3">
+            <a:schemeClr val="accent1"/>
+          </a:fillRef>
+          <a:effectRef idx="2">
+            <a:schemeClr val="accent1"/>
+          </a:effectRef>
+          <a:fontRef idx="minor">
+            <a:schemeClr val="lt1"/>
+          </a:fontRef>
+        </p:style>
+        <p:txBody>
+          <a:bodyPr rtlCol="0" anchor="ctr"/>
+          <a:lstStyle/>
+          <a:p>
+            <a:pPr algn="ctr"/>
+          </a:p>
+        </p:txBody>
+      </p:sp>
+      <p:sp>
+        <p:nvSpPr>
+          <p:cNvPr id="18" name="TextBox 17"/>
+          <p:cNvSpPr txBox="1"/>
+          <p:nvPr/>
+        </p:nvSpPr>
+        <p:spPr>
+          <a:xfrm>
+            <a:off x="978408" y="5175504"/>
+            <a:ext cx="3200400" cy="365760"/>
+          </a:xfrm>
+          <a:prstGeom prst="rect">
+            <a:avLst/>
+          </a:prstGeom>
+          <a:noFill/>
+        </p:spPr>
+        <p:txBody>
+          <a:bodyPr wrap="square" anchor="t" lIns="0" rIns="0" tIns="0" bIns="0">
+            <a:spAutoFit/>
+          </a:bodyPr>
+          <a:lstStyle/>
+          <a:p>
+            <a:pPr algn="l">
+              <a:lnSpc>
+                <a:spcPct val="115000"/>
+              </a:lnSpc>
+            </a:pPr>
+            <a:r>
+              <a:rPr sz="1350" b="1">
+                <a:solidFill>
+                  <a:srgbClr val="1E242E"/>
+                </a:solidFill>
+                <a:latin typeface="Segoe UI"/>
+              </a:rPr>
+              <a:t>Data must stay on-premises</a:t>
+            </a:r>
+          </a:p>
+        </p:txBody>
+      </p:sp>
+      <p:sp>
+        <p:nvSpPr>
+          <p:cNvPr id="19" name="TextBox 18"/>
+          <p:cNvSpPr txBox="1"/>
+          <p:nvPr/>
+        </p:nvSpPr>
+        <p:spPr>
+          <a:xfrm>
+            <a:off x="4389120" y="5175504"/>
+            <a:ext cx="2286000" cy="365760"/>
+          </a:xfrm>
+          <a:prstGeom prst="rect">
+            <a:avLst/>
+          </a:prstGeom>
+          <a:noFill/>
+        </p:spPr>
+        <p:txBody>
+          <a:bodyPr wrap="square" anchor="t" lIns="0" rIns="0" tIns="0" bIns="0">
+            <a:spAutoFit/>
+          </a:bodyPr>
+          <a:lstStyle/>
+          <a:p>
+            <a:pPr algn="l">
+              <a:lnSpc>
+                <a:spcPct val="100000"/>
+              </a:lnSpc>
+            </a:pPr>
+            <a:r>
+              <a:rPr sz="1350" b="1">
+                <a:solidFill>
+                  <a:srgbClr val="7A5BC4"/>
+                </a:solidFill>
+                <a:latin typeface="Segoe UI"/>
+              </a:rPr>
+              <a:t>Hyper-V + SCVMM  83</a:t>
+            </a:r>
+          </a:p>
+        </p:txBody>
+      </p:sp>
+      <p:sp>
+        <p:nvSpPr>
+          <p:cNvPr id="20" name="TextBox 19"/>
+          <p:cNvSpPr txBox="1"/>
+          <p:nvPr/>
+        </p:nvSpPr>
+        <p:spPr>
+          <a:xfrm>
+            <a:off x="6812280" y="5157216"/>
+            <a:ext cx="4480560" cy="640080"/>
+          </a:xfrm>
+          <a:prstGeom prst="rect">
+            <a:avLst/>
+          </a:prstGeom>
+          <a:noFill/>
+        </p:spPr>
+        <p:txBody>
+          <a:bodyPr wrap="square" anchor="t" lIns="0" rIns="0" tIns="0" bIns="0">
+            <a:spAutoFit/>
+          </a:bodyPr>
+          <a:lstStyle/>
+          <a:p>
+            <a:pPr algn="l">
+              <a:lnSpc>
+                <a:spcPct val="120000"/>
+              </a:lnSpc>
+            </a:pPr>
+            <a:r>
+              <a:rPr sz="1150" b="0">
+                <a:solidFill>
+                  <a:srgbClr val="5A6372"/>
+                </a:solidFill>
+                <a:latin typeface="Segoe UI"/>
+              </a:rPr>
+              <a:t>Azure Local scores 82 and gives an Azure control plane in your data centre. Public cloud is simply not an option here.</a:t>
+            </a:r>
+          </a:p>
+        </p:txBody>
+      </p:sp>
+      <p:sp>
+        <p:nvSpPr>
+          <p:cNvPr id="21" name="Rounded Rectangle 20"/>
+          <p:cNvSpPr/>
+          <p:nvPr/>
+        </p:nvSpPr>
+        <p:spPr>
+          <a:xfrm>
+            <a:off x="777240" y="5559552"/>
+            <a:ext cx="10637215" cy="640080"/>
+          </a:xfrm>
+          <a:prstGeom prst="roundRect">
+            <a:avLst/>
+          </a:prstGeom>
+          <a:solidFill>
+            <a:srgbClr val="F5F7FB"/>
+          </a:solidFill>
+          <a:ln>
+            <a:noFill/>
+          </a:ln>
+          <a:effectLst/>
+        </p:spPr>
+        <p:style>
+          <a:lnRef idx="1">
+            <a:schemeClr val="accent1"/>
+          </a:lnRef>
+          <a:fillRef idx="3">
+            <a:schemeClr val="accent1"/>
+          </a:fillRef>
+          <a:effectRef idx="2">
+            <a:schemeClr val="accent1"/>
+          </a:effectRef>
+          <a:fontRef idx="minor">
+            <a:schemeClr val="lt1"/>
+          </a:fontRef>
+        </p:style>
+        <p:txBody>
+          <a:bodyPr rtlCol="0" anchor="ctr"/>
+          <a:lstStyle/>
+          <a:p>
+            <a:pPr algn="ctr"/>
+          </a:p>
+        </p:txBody>
+      </p:sp>
+      <p:sp>
+        <p:nvSpPr>
+          <p:cNvPr id="22" name="Rectangle 21"/>
+          <p:cNvSpPr/>
+          <p:nvPr/>
+        </p:nvSpPr>
+        <p:spPr>
+          <a:xfrm>
+            <a:off x="777240" y="5559552"/>
+            <a:ext cx="54864" cy="640080"/>
+          </a:xfrm>
+          <a:prstGeom prst="rect">
+            <a:avLst/>
+          </a:prstGeom>
+          <a:solidFill>
+            <a:srgbClr val="3B6FD4"/>
+          </a:solidFill>
+          <a:ln>
+            <a:noFill/>
+          </a:ln>
+          <a:effectLst/>
+        </p:spPr>
+        <p:style>
+          <a:lnRef idx="1">
+            <a:schemeClr val="accent1"/>
+          </a:lnRef>
+          <a:fillRef idx="3">
+            <a:schemeClr val="accent1"/>
+          </a:fillRef>
+          <a:effectRef idx="2">
+            <a:schemeClr val="accent1"/>
+          </a:effectRef>
+          <a:fontRef idx="minor">
+            <a:schemeClr val="lt1"/>
+          </a:fontRef>
+        </p:style>
+        <p:txBody>
+          <a:bodyPr rtlCol="0" anchor="ctr"/>
+          <a:lstStyle/>
+          <a:p>
+            <a:pPr algn="ctr"/>
+          </a:p>
+        </p:txBody>
+      </p:sp>
+      <p:sp>
+        <p:nvSpPr>
+          <p:cNvPr id="23" name="TextBox 22"/>
+          <p:cNvSpPr txBox="1"/>
+          <p:nvPr/>
+        </p:nvSpPr>
+        <p:spPr>
+          <a:xfrm>
+            <a:off x="1051560" y="5669280"/>
+            <a:ext cx="10088575" cy="457200"/>
+          </a:xfrm>
+          <a:prstGeom prst="rect">
+            <a:avLst/>
+          </a:prstGeom>
+          <a:noFill/>
+        </p:spPr>
+        <p:txBody>
+          <a:bodyPr wrap="square" anchor="t" lIns="0" rIns="0" tIns="0" bIns="0">
+            <a:spAutoFit/>
+          </a:bodyPr>
+          <a:lstStyle/>
+          <a:p>
+            <a:pPr algn="l">
+              <a:lnSpc>
+                <a:spcPct val="115000"/>
+              </a:lnSpc>
+            </a:pPr>
+            <a:r>
+              <a:rPr sz="1250" b="1">
+                <a:solidFill>
+                  <a:srgbClr val="1E242E"/>
+                </a:solidFill>
+                <a:latin typeface="Segoe UI"/>
+              </a:rPr>
+              <a:t>Azure scores 92 against AWS 68, OCI 64 and Google 60 on a balanced weighting — but that lead is Hybrid Benefit and free ESU. Without Software Assurance it narrows sharply, and Ascend says so.</a:t>
+            </a:r>
+          </a:p>
+        </p:txBody>
+      </p:sp>
+      <p:sp>
+        <p:nvSpPr>
+          <p:cNvPr id="24" name="TextBox 23"/>
+          <p:cNvSpPr txBox="1"/>
+          <p:nvPr/>
+        </p:nvSpPr>
+        <p:spPr>
+          <a:xfrm>
+            <a:off x="777240" y="6355080"/>
+            <a:ext cx="5486400" cy="274320"/>
+          </a:xfrm>
+          <a:prstGeom prst="rect">
+            <a:avLst/>
+          </a:prstGeom>
+          <a:noFill/>
+        </p:spPr>
+        <p:txBody>
+          <a:bodyPr wrap="square" anchor="t" lIns="0" rIns="0" tIns="0" bIns="0">
+            <a:spAutoFit/>
+          </a:bodyPr>
+          <a:lstStyle/>
+          <a:p>
+            <a:pPr algn="l">
+              <a:lnSpc>
+                <a:spcPct val="100000"/>
+              </a:lnSpc>
+            </a:pPr>
+            <a:r>
+              <a:rPr sz="900" b="0">
+                <a:solidFill>
+                  <a:srgbClr val="5A6372"/>
+                </a:solidFill>
+                <a:latin typeface="Segoe UI"/>
+              </a:rPr>
+              <a:t>CISCLD Ascend  ·  onpremtocloud.streamlit.app</a:t>
+            </a:r>
+          </a:p>
+        </p:txBody>
+      </p:sp>
+      <p:sp>
+        <p:nvSpPr>
+          <p:cNvPr id="25" name="TextBox 24"/>
+          <p:cNvSpPr txBox="1"/>
+          <p:nvPr/>
+        </p:nvSpPr>
+        <p:spPr>
+          <a:xfrm>
+            <a:off x="10500055" y="6355080"/>
+            <a:ext cx="914400" cy="274320"/>
+          </a:xfrm>
+          <a:prstGeom prst="rect">
+            <a:avLst/>
+          </a:prstGeom>
+          <a:noFill/>
+        </p:spPr>
+        <p:txBody>
+          <a:bodyPr wrap="square" anchor="t" lIns="0" rIns="0" tIns="0" bIns="0">
+            <a:spAutoFit/>
+          </a:bodyPr>
+          <a:lstStyle/>
+          <a:p>
+            <a:pPr algn="r">
+              <a:lnSpc>
+                <a:spcPct val="100000"/>
+              </a:lnSpc>
+            </a:pPr>
+            <a:r>
+              <a:rPr sz="900" b="0">
+                <a:solidFill>
+                  <a:srgbClr val="5A6372"/>
+                </a:solidFill>
+                <a:latin typeface="Segoe UI"/>
+              </a:rPr>
+              <a:t>12</a:t>
+            </a:r>
+          </a:p>
+        </p:txBody>
+      </p:sp>
+    </p:spTree>
+  </p:cSld>
+  <p:clrMapOvr>
+    <a:masterClrMapping/>
+  </p:clrMapOvr>
+</p:sld>
+</file>
+
+<file path=ppt/slides/slide13.xml><?xml version="1.0" encoding="utf-8"?>
+<p:sld xmlns:a="http://schemas.openxmlformats.org/drawingml/2006/main" xmlns:p="http://schemas.openxmlformats.org/presentationml/2006/main" xmlns:r="http://schemas.openxmlformats.org/officeDocument/2006/relationships">
+  <p:cSld>
+    <p:bg>
+      <p:bgPr>
+        <a:solidFill>
+          <a:srgbClr val="FFFFFF"/>
+        </a:solidFill>
+        <a:effectLst/>
+      </p:bgPr>
+    </p:bg>
+    <p:spTree>
+      <p:nvGrpSpPr>
+        <p:cNvPr id="1" name=""/>
+        <p:cNvGrpSpPr/>
+        <p:nvPr/>
+      </p:nvGrpSpPr>
+      <p:grpSpPr/>
+      <p:sp>
+        <p:nvSpPr>
+          <p:cNvPr id="2" name="TextBox 1"/>
+          <p:cNvSpPr txBox="1"/>
+          <p:nvPr/>
+        </p:nvSpPr>
+        <p:spPr>
+          <a:xfrm>
+            <a:off x="777240" y="566928"/>
+            <a:ext cx="10637215" cy="274320"/>
+          </a:xfrm>
+          <a:prstGeom prst="rect">
+            <a:avLst/>
+          </a:prstGeom>
+          <a:noFill/>
+        </p:spPr>
+        <p:txBody>
+          <a:bodyPr wrap="square" anchor="t" lIns="0" rIns="0" tIns="0" bIns="0">
+            <a:spAutoFit/>
+          </a:bodyPr>
+          <a:lstStyle/>
+          <a:p>
+            <a:pPr algn="l">
+              <a:lnSpc>
+                <a:spcPct val="100000"/>
+              </a:lnSpc>
+            </a:pPr>
+            <a:r>
+              <a:rPr sz="1100" b="1">
+                <a:solidFill>
+                  <a:srgbClr val="3B6FD4"/>
+                </a:solidFill>
+                <a:latin typeface="Segoe UI"/>
+              </a:rPr>
+              <a:t>ACCESS AND DATA HANDLING</a:t>
+            </a:r>
+          </a:p>
+        </p:txBody>
+      </p:sp>
+      <p:sp>
+        <p:nvSpPr>
+          <p:cNvPr id="3" name="TextBox 2"/>
+          <p:cNvSpPr txBox="1"/>
+          <p:nvPr/>
+        </p:nvSpPr>
+        <p:spPr>
+          <a:xfrm>
+            <a:off x="777240" y="932688"/>
+            <a:ext cx="10637215" cy="777240"/>
+          </a:xfrm>
+          <a:prstGeom prst="rect">
+            <a:avLst/>
+          </a:prstGeom>
+          <a:noFill/>
+        </p:spPr>
+        <p:txBody>
+          <a:bodyPr wrap="square" anchor="t" lIns="0" rIns="0" tIns="0" bIns="0">
+            <a:spAutoFit/>
+          </a:bodyPr>
+          <a:lstStyle/>
+          <a:p>
+            <a:pPr algn="l">
+              <a:lnSpc>
+                <a:spcPct val="100000"/>
+              </a:lnSpc>
+            </a:pPr>
+            <a:r>
+              <a:rPr sz="3200" b="1">
+                <a:solidFill>
+                  <a:srgbClr val="1E242E"/>
+                </a:solidFill>
+                <a:latin typeface="Segoe UI"/>
+              </a:rPr>
+              <a:t>Signed in, and nothing kept</a:t>
+            </a:r>
+          </a:p>
+        </p:txBody>
+      </p:sp>
+      <p:sp>
+        <p:nvSpPr>
+          <p:cNvPr id="4" name="Rectangle 3"/>
+          <p:cNvSpPr/>
+          <p:nvPr/>
+        </p:nvSpPr>
+        <p:spPr>
+          <a:xfrm>
+            <a:off x="777240" y="2368296"/>
+            <a:ext cx="45720" cy="201168"/>
+          </a:xfrm>
+          <a:prstGeom prst="rect">
+            <a:avLst/>
+          </a:prstGeom>
+          <a:solidFill>
+            <a:srgbClr val="3B6FD4"/>
+          </a:solidFill>
+          <a:ln>
+            <a:noFill/>
+          </a:ln>
+          <a:effectLst/>
+        </p:spPr>
+        <p:style>
+          <a:lnRef idx="1">
+            <a:schemeClr val="accent1"/>
+          </a:lnRef>
+          <a:fillRef idx="3">
+            <a:schemeClr val="accent1"/>
+          </a:fillRef>
+          <a:effectRef idx="2">
+            <a:schemeClr val="accent1"/>
+          </a:effectRef>
+          <a:fontRef idx="minor">
+            <a:schemeClr val="lt1"/>
+          </a:fontRef>
+        </p:style>
+        <p:txBody>
+          <a:bodyPr rtlCol="0" anchor="ctr"/>
+          <a:lstStyle/>
+          <a:p>
+            <a:pPr algn="ctr"/>
+          </a:p>
+        </p:txBody>
+      </p:sp>
+      <p:sp>
+        <p:nvSpPr>
+          <p:cNvPr id="5" name="TextBox 4"/>
+          <p:cNvSpPr txBox="1"/>
+          <p:nvPr/>
+        </p:nvSpPr>
+        <p:spPr>
+          <a:xfrm>
+            <a:off x="996696" y="2286000"/>
+            <a:ext cx="10417759" cy="868680"/>
+          </a:xfrm>
+          <a:prstGeom prst="rect">
+            <a:avLst/>
+          </a:prstGeom>
+          <a:noFill/>
+        </p:spPr>
+        <p:txBody>
+          <a:bodyPr wrap="square" anchor="t" lIns="0" rIns="0" tIns="0" bIns="0">
+            <a:spAutoFit/>
+          </a:bodyPr>
+          <a:lstStyle/>
+          <a:p>
+            <a:pPr algn="l">
+              <a:lnSpc>
+                <a:spcPct val="122000"/>
+              </a:lnSpc>
+              <a:spcAft>
+                <a:spcPts val="500"/>
+              </a:spcAft>
+            </a:pPr>
+            <a:r>
+              <a:rPr sz="1350" b="1">
+                <a:solidFill>
+                  <a:srgbClr val="1E242E"/>
+                </a:solidFill>
+                <a:latin typeface="Segoe UI"/>
+              </a:rPr>
+              <a:t>Accounts are issued per engagement</a:t>
+            </a:r>
+          </a:p>
+          <a:p>
+            <a:pPr algn="l">
+              <a:lnSpc>
+                <a:spcPct val="122000"/>
+              </a:lnSpc>
+            </a:pPr>
+            <a:r>
+              <a:rPr sz="1150" b="0">
+                <a:solidFill>
+                  <a:srgbClr val="5A6372"/>
+                </a:solidFill>
+                <a:latin typeface="Segoe UI"/>
+              </a:rPr>
+              <a:t>PBKDF2-HMAC-SHA256 at 240,000 iterations with a per-account salt. Sessions expire after eight idle hours.</a:t>
+            </a:r>
+          </a:p>
+        </p:txBody>
+      </p:sp>
+      <p:sp>
+        <p:nvSpPr>
+          <p:cNvPr id="6" name="Rectangle 5"/>
+          <p:cNvSpPr/>
+          <p:nvPr/>
+        </p:nvSpPr>
+        <p:spPr>
+          <a:xfrm>
+            <a:off x="777240" y="3236976"/>
+            <a:ext cx="45720" cy="201168"/>
+          </a:xfrm>
+          <a:prstGeom prst="rect">
+            <a:avLst/>
+          </a:prstGeom>
+          <a:solidFill>
+            <a:srgbClr val="3B6FD4"/>
+          </a:solidFill>
+          <a:ln>
+            <a:noFill/>
+          </a:ln>
+          <a:effectLst/>
+        </p:spPr>
+        <p:style>
+          <a:lnRef idx="1">
+            <a:schemeClr val="accent1"/>
+          </a:lnRef>
+          <a:fillRef idx="3">
+            <a:schemeClr val="accent1"/>
+          </a:fillRef>
+          <a:effectRef idx="2">
+            <a:schemeClr val="accent1"/>
+          </a:effectRef>
+          <a:fontRef idx="minor">
+            <a:schemeClr val="lt1"/>
+          </a:fontRef>
+        </p:style>
+        <p:txBody>
+          <a:bodyPr rtlCol="0" anchor="ctr"/>
+          <a:lstStyle/>
+          <a:p>
+            <a:pPr algn="ctr"/>
+          </a:p>
+        </p:txBody>
+      </p:sp>
+      <p:sp>
+        <p:nvSpPr>
+          <p:cNvPr id="7" name="TextBox 6"/>
+          <p:cNvSpPr txBox="1"/>
+          <p:nvPr/>
+        </p:nvSpPr>
+        <p:spPr>
+          <a:xfrm>
+            <a:off x="996696" y="3154680"/>
+            <a:ext cx="10417759" cy="868680"/>
+          </a:xfrm>
+          <a:prstGeom prst="rect">
+            <a:avLst/>
+          </a:prstGeom>
+          <a:noFill/>
+        </p:spPr>
+        <p:txBody>
+          <a:bodyPr wrap="square" anchor="t" lIns="0" rIns="0" tIns="0" bIns="0">
+            <a:spAutoFit/>
+          </a:bodyPr>
+          <a:lstStyle/>
+          <a:p>
+            <a:pPr algn="l">
+              <a:lnSpc>
+                <a:spcPct val="122000"/>
+              </a:lnSpc>
+              <a:spcAft>
+                <a:spcPts val="500"/>
+              </a:spcAft>
+            </a:pPr>
+            <a:r>
+              <a:rPr sz="1350" b="1">
+                <a:solidFill>
+                  <a:srgbClr val="1E242E"/>
+                </a:solidFill>
+                <a:latin typeface="Segoe UI"/>
+              </a:rPr>
+              <a:t>Your inventory stays in the session</a:t>
+            </a:r>
+          </a:p>
+          <a:p>
+            <a:pPr algn="l">
+              <a:lnSpc>
+                <a:spcPct val="122000"/>
+              </a:lnSpc>
+            </a:pPr>
+            <a:r>
+              <a:rPr sz="1150" b="0">
+                <a:solidFill>
+                  <a:srgbClr val="5A6372"/>
+                </a:solidFill>
+                <a:latin typeface="Segoe UI"/>
+              </a:rPr>
+              <a:t>The uploaded file is held for the life of the browser session and written nowhere. Closing the tab discards it.</a:t>
+            </a:r>
+          </a:p>
+        </p:txBody>
+      </p:sp>
+      <p:sp>
+        <p:nvSpPr>
+          <p:cNvPr id="8" name="Rectangle 7"/>
+          <p:cNvSpPr/>
+          <p:nvPr/>
+        </p:nvSpPr>
+        <p:spPr>
+          <a:xfrm>
+            <a:off x="777240" y="4105656"/>
+            <a:ext cx="45720" cy="201168"/>
+          </a:xfrm>
+          <a:prstGeom prst="rect">
+            <a:avLst/>
+          </a:prstGeom>
+          <a:solidFill>
+            <a:srgbClr val="3B6FD4"/>
+          </a:solidFill>
+          <a:ln>
+            <a:noFill/>
+          </a:ln>
+          <a:effectLst/>
+        </p:spPr>
+        <p:style>
+          <a:lnRef idx="1">
+            <a:schemeClr val="accent1"/>
+          </a:lnRef>
+          <a:fillRef idx="3">
+            <a:schemeClr val="accent1"/>
+          </a:fillRef>
+          <a:effectRef idx="2">
+            <a:schemeClr val="accent1"/>
+          </a:effectRef>
+          <a:fontRef idx="minor">
+            <a:schemeClr val="lt1"/>
+          </a:fontRef>
+        </p:style>
+        <p:txBody>
+          <a:bodyPr rtlCol="0" anchor="ctr"/>
+          <a:lstStyle/>
+          <a:p>
+            <a:pPr algn="ctr"/>
+          </a:p>
+        </p:txBody>
+      </p:sp>
+      <p:sp>
+        <p:nvSpPr>
+          <p:cNvPr id="9" name="TextBox 8"/>
+          <p:cNvSpPr txBox="1"/>
+          <p:nvPr/>
+        </p:nvSpPr>
+        <p:spPr>
+          <a:xfrm>
+            <a:off x="996696" y="4023360"/>
+            <a:ext cx="10417759" cy="868680"/>
+          </a:xfrm>
+          <a:prstGeom prst="rect">
+            <a:avLst/>
+          </a:prstGeom>
+          <a:noFill/>
+        </p:spPr>
+        <p:txBody>
+          <a:bodyPr wrap="square" anchor="t" lIns="0" rIns="0" tIns="0" bIns="0">
+            <a:spAutoFit/>
+          </a:bodyPr>
+          <a:lstStyle/>
+          <a:p>
+            <a:pPr algn="l">
+              <a:lnSpc>
+                <a:spcPct val="122000"/>
+              </a:lnSpc>
+              <a:spcAft>
+                <a:spcPts val="500"/>
+              </a:spcAft>
+            </a:pPr>
+            <a:r>
+              <a:rPr sz="1350" b="1">
+                <a:solidFill>
+                  <a:srgbClr val="1E242E"/>
+                </a:solidFill>
+                <a:latin typeface="Segoe UI"/>
+              </a:rPr>
+              <a:t>Nothing is sent to a vendor</a:t>
+            </a:r>
+          </a:p>
+          <a:p>
+            <a:pPr algn="l">
+              <a:lnSpc>
+                <a:spcPct val="122000"/>
+              </a:lnSpc>
+            </a:pPr>
+            <a:r>
+              <a:rPr sz="1150" b="0">
+                <a:solidFill>
+                  <a:srgbClr val="5A6372"/>
+                </a:solidFill>
+                <a:latin typeface="Segoe UI"/>
+              </a:rPr>
+              <a:t>Pricing calls ask for public rate cards by region and SKU. No estate data leaves the application.</a:t>
+            </a:r>
+          </a:p>
+        </p:txBody>
+      </p:sp>
+      <p:sp>
+        <p:nvSpPr>
+          <p:cNvPr id="10" name="Rectangle 9"/>
+          <p:cNvSpPr/>
+          <p:nvPr/>
+        </p:nvSpPr>
+        <p:spPr>
+          <a:xfrm>
+            <a:off x="777240" y="4974336"/>
+            <a:ext cx="45720" cy="201168"/>
+          </a:xfrm>
+          <a:prstGeom prst="rect">
+            <a:avLst/>
+          </a:prstGeom>
+          <a:solidFill>
+            <a:srgbClr val="3B6FD4"/>
+          </a:solidFill>
+          <a:ln>
+            <a:noFill/>
+          </a:ln>
+          <a:effectLst/>
+        </p:spPr>
+        <p:style>
+          <a:lnRef idx="1">
+            <a:schemeClr val="accent1"/>
+          </a:lnRef>
+          <a:fillRef idx="3">
+            <a:schemeClr val="accent1"/>
+          </a:fillRef>
+          <a:effectRef idx="2">
+            <a:schemeClr val="accent1"/>
+          </a:effectRef>
+          <a:fontRef idx="minor">
+            <a:schemeClr val="lt1"/>
+          </a:fontRef>
+        </p:style>
+        <p:txBody>
+          <a:bodyPr rtlCol="0" anchor="ctr"/>
+          <a:lstStyle/>
+          <a:p>
+            <a:pPr algn="ctr"/>
+          </a:p>
+        </p:txBody>
+      </p:sp>
+      <p:sp>
+        <p:nvSpPr>
+          <p:cNvPr id="11" name="TextBox 10"/>
+          <p:cNvSpPr txBox="1"/>
+          <p:nvPr/>
+        </p:nvSpPr>
+        <p:spPr>
+          <a:xfrm>
+            <a:off x="996696" y="4892040"/>
+            <a:ext cx="10417759" cy="868680"/>
+          </a:xfrm>
+          <a:prstGeom prst="rect">
+            <a:avLst/>
+          </a:prstGeom>
+          <a:noFill/>
+        </p:spPr>
+        <p:txBody>
+          <a:bodyPr wrap="square" anchor="t" lIns="0" rIns="0" tIns="0" bIns="0">
+            <a:spAutoFit/>
+          </a:bodyPr>
+          <a:lstStyle/>
+          <a:p>
+            <a:pPr algn="l">
+              <a:lnSpc>
+                <a:spcPct val="122000"/>
+              </a:lnSpc>
+              <a:spcAft>
+                <a:spcPts val="500"/>
+              </a:spcAft>
+            </a:pPr>
+            <a:r>
+              <a:rPr sz="1350" b="1">
+                <a:solidFill>
+                  <a:srgbClr val="1E242E"/>
+                </a:solidFill>
+                <a:latin typeface="Segoe UI"/>
+              </a:rPr>
+              <a:t>Everything is exportable</a:t>
+            </a:r>
+          </a:p>
+          <a:p>
+            <a:pPr algn="l">
+              <a:lnSpc>
+                <a:spcPct val="122000"/>
+              </a:lnSpc>
+            </a:pPr>
+            <a:r>
+              <a:rPr sz="1150" b="0">
+                <a:solidFill>
+                  <a:srgbClr val="5A6372"/>
+                </a:solidFill>
+                <a:latin typeface="Segoe UI"/>
+              </a:rPr>
+              <a:t>Every table downloads as CSV, so the analysis can be reviewed in your own tooling rather than taken on trust.</a:t>
+            </a:r>
+          </a:p>
+        </p:txBody>
+      </p:sp>
+      <p:sp>
+        <p:nvSpPr>
+          <p:cNvPr id="12" name="TextBox 11"/>
+          <p:cNvSpPr txBox="1"/>
+          <p:nvPr/>
+        </p:nvSpPr>
+        <p:spPr>
+          <a:xfrm>
+            <a:off x="777240" y="6355080"/>
+            <a:ext cx="5486400" cy="274320"/>
+          </a:xfrm>
+          <a:prstGeom prst="rect">
+            <a:avLst/>
+          </a:prstGeom>
+          <a:noFill/>
+        </p:spPr>
+        <p:txBody>
+          <a:bodyPr wrap="square" anchor="t" lIns="0" rIns="0" tIns="0" bIns="0">
+            <a:spAutoFit/>
+          </a:bodyPr>
+          <a:lstStyle/>
+          <a:p>
+            <a:pPr algn="l">
+              <a:lnSpc>
+                <a:spcPct val="100000"/>
+              </a:lnSpc>
+            </a:pPr>
+            <a:r>
+              <a:rPr sz="900" b="0">
+                <a:solidFill>
+                  <a:srgbClr val="5A6372"/>
+                </a:solidFill>
+                <a:latin typeface="Segoe UI"/>
+              </a:rPr>
+              <a:t>CISCLD Ascend  ·  onpremtocloud.streamlit.app</a:t>
+            </a:r>
+          </a:p>
+        </p:txBody>
+      </p:sp>
+      <p:sp>
+        <p:nvSpPr>
+          <p:cNvPr id="13" name="TextBox 12"/>
+          <p:cNvSpPr txBox="1"/>
+          <p:nvPr/>
+        </p:nvSpPr>
+        <p:spPr>
+          <a:xfrm>
+            <a:off x="10500055" y="6355080"/>
+            <a:ext cx="914400" cy="274320"/>
+          </a:xfrm>
+          <a:prstGeom prst="rect">
+            <a:avLst/>
+          </a:prstGeom>
+          <a:noFill/>
+        </p:spPr>
+        <p:txBody>
+          <a:bodyPr wrap="square" anchor="t" lIns="0" rIns="0" tIns="0" bIns="0">
+            <a:spAutoFit/>
+          </a:bodyPr>
+          <a:lstStyle/>
+          <a:p>
+            <a:pPr algn="r">
+              <a:lnSpc>
+                <a:spcPct val="100000"/>
+              </a:lnSpc>
+            </a:pPr>
+            <a:r>
+              <a:rPr sz="900" b="0">
+                <a:solidFill>
+                  <a:srgbClr val="5A6372"/>
+                </a:solidFill>
+                <a:latin typeface="Segoe UI"/>
+              </a:rPr>
+              <a:t>13</a:t>
+            </a:r>
+          </a:p>
+        </p:txBody>
+      </p:sp>
+    </p:spTree>
+  </p:cSld>
+  <p:clrMapOvr>
+    <a:masterClrMapping/>
+  </p:clrMapOvr>
+</p:sld>
+</file>
+
+<file path=ppt/slides/slide14.xml><?xml version="1.0" encoding="utf-8"?>
 <p:sld xmlns:a="http://schemas.openxmlformats.org/drawingml/2006/main" xmlns:p="http://schemas.openxmlformats.org/presentationml/2006/main" xmlns:r="http://schemas.openxmlformats.org/officeDocument/2006/relationships">
   <p:cSld>
     <p:bg>
